--- a/PPT/01_전화번호부.pptx
+++ b/PPT/01_전화번호부.pptx
@@ -4038,7 +4038,7 @@
                 <a:latin typeface="맑은 고딕"/>
                 <a:ea typeface="맑은 고딕"/>
               </a:rPr>
-              <a:t>무인체계 SW 개발 기초 세미나  ·  C# / WPF (.NET 8)</a:t>
+              <a:t>SW 개발 기초 세미나  ·  C# / WPF (.NET 8)</a:t>
             </a:r>
           </a:p>
         </p:txBody>
